--- a/Versão Final/Finalíssima/files/IGDA_Evolucao_CEX_v10.pptx
+++ b/Versão Final/Finalíssima/files/IGDA_Evolucao_CEX_v10.pptx
@@ -347,37 +347,37 @@
                 <c:formatCode>0.0</c:formatCode>
                 <c:ptCount val="11"/>
                 <c:pt idx="0">
-                  <c:v>42.2497018188394</c:v>
+                  <c:v>42.25787321543529</c:v>
                 </c:pt>
                 <c:pt idx="1">
-                  <c:v>42.49725307006943</c:v>
+                  <c:v>42.53088428471823</c:v>
                 </c:pt>
                 <c:pt idx="2">
-                  <c:v>42.202566399358226</c:v>
+                  <c:v>42.21649226895563</c:v>
                 </c:pt>
                 <c:pt idx="3">
-                  <c:v>42.57947139399472</c:v>
+                  <c:v>42.598103796241965</c:v>
                 </c:pt>
                 <c:pt idx="4">
-                  <c:v>42.548040766467416</c:v>
+                  <c:v>42.54437698797057</c:v>
                 </c:pt>
                 <c:pt idx="5">
-                  <c:v>39.718181850384276</c:v>
+                  <c:v>39.72989238412637</c:v>
                 </c:pt>
                 <c:pt idx="6">
-                  <c:v>43.57634831773558</c:v>
+                  <c:v>43.538430572486135</c:v>
                 </c:pt>
                 <c:pt idx="7">
-                  <c:v>44.39131861815153</c:v>
+                  <c:v>44.334267266054844</c:v>
                 </c:pt>
                 <c:pt idx="8">
-                  <c:v>44.60370161705667</c:v>
+                  <c:v>44.566636762630004</c:v>
                 </c:pt>
                 <c:pt idx="9">
-                  <c:v>45.684296593548</c:v>
+                  <c:v>45.686128618138625</c:v>
                 </c:pt>
                 <c:pt idx="10">
-                  <c:v>45.662917854175184</c:v>
+                  <c:v>45.67737191204964</c:v>
                 </c:pt>
               </c:numCache>
             </c:numRef>
@@ -952,37 +952,37 @@
                 <c:formatCode>0.0</c:formatCode>
                 <c:ptCount val="11"/>
                 <c:pt idx="0">
-                  <c:v>48.74793953630748</c:v>
+                  <c:v>48.76440344106937</c:v>
                 </c:pt>
                 <c:pt idx="1">
-                  <c:v>43.99219652021693</c:v>
+                  <c:v>44.0670830916455</c:v>
                 </c:pt>
                 <c:pt idx="2">
-                  <c:v>42.458424216885085</c:v>
+                  <c:v>42.49033631212318</c:v>
                 </c:pt>
                 <c:pt idx="3">
-                  <c:v>46.62362619704472</c:v>
+                  <c:v>46.66616648275901</c:v>
                 </c:pt>
                 <c:pt idx="4">
-                  <c:v>43.72271050921044</c:v>
+                  <c:v>43.71677241397234</c:v>
                 </c:pt>
                 <c:pt idx="5">
-                  <c:v>34.07617404612649</c:v>
+                  <c:v>34.09912909374554</c:v>
                 </c:pt>
                 <c:pt idx="6">
-                  <c:v>48.55714545637705</c:v>
+                  <c:v>48.4679383135199</c:v>
                 </c:pt>
                 <c:pt idx="7">
-                  <c:v>50.23822101747226</c:v>
+                  <c:v>50.11096787461513</c:v>
                 </c:pt>
                 <c:pt idx="8">
-                  <c:v>46.65107665350037</c:v>
+                  <c:v>46.569104843976554</c:v>
                 </c:pt>
                 <c:pt idx="9">
-                  <c:v>49.00175623787552</c:v>
+                  <c:v>49.047640047399334</c:v>
                 </c:pt>
                 <c:pt idx="10">
-                  <c:v>49.312614441449774</c:v>
+                  <c:v>49.38799348906882</c:v>
                 </c:pt>
               </c:numCache>
             </c:numRef>
@@ -2418,10 +2418,10 @@
                   <c:v>58.25554966095238</c:v>
                 </c:pt>
                 <c:pt idx="9">
-                  <c:v>57.0218353752381</c:v>
+                  <c:v>56.83612108952381</c:v>
                 </c:pt>
                 <c:pt idx="10">
-                  <c:v>57.0218353752381</c:v>
+                  <c:v>56.83612108952381</c:v>
                 </c:pt>
               </c:numCache>
             </c:numRef>
@@ -2614,7 +2614,7 @@
               <c:strCache>
                 <c:ptCount val="1"/>
                 <c:pt idx="0">
-                  <c:v>8. Diversificação Produtiva e Setor Privado</c:v>
+                  <c:v>8. Diversificação Produtiva e Sector Privado</c:v>
                 </c:pt>
               </c:strCache>
             </c:strRef>
@@ -2681,37 +2681,37 @@
                 <c:formatCode>0.0</c:formatCode>
                 <c:ptCount val="11"/>
                 <c:pt idx="0">
-                  <c:v>19.964281072755185</c:v>
+                  <c:v>19.988441072755187</c:v>
                 </c:pt>
                 <c:pt idx="1">
-                  <c:v>23.370183209191975</c:v>
+                  <c:v>23.478583209191974</c:v>
                 </c:pt>
                 <c:pt idx="2">
-                  <c:v>24.594713541811885</c:v>
+                  <c:v>24.641193541811887</c:v>
                 </c:pt>
                 <c:pt idx="3">
-                  <c:v>23.123417006898375</c:v>
+                  <c:v>23.183337006898377</c:v>
                 </c:pt>
                 <c:pt idx="4">
-                  <c:v>21.847303422876468</c:v>
+                  <c:v>21.83522342287647</c:v>
                 </c:pt>
                 <c:pt idx="5">
-                  <c:v>17.17282525644753</c:v>
+                  <c:v>17.201785256447533</c:v>
                 </c:pt>
                 <c:pt idx="6">
-                  <c:v>24.67806943479478</c:v>
+                  <c:v>24.55190943479478</c:v>
                 </c:pt>
                 <c:pt idx="7">
-                  <c:v>23.030395767836172</c:v>
+                  <c:v>22.852555767836172</c:v>
                 </c:pt>
                 <c:pt idx="8">
-                  <c:v>23.24590698908722</c:v>
+                  <c:v>23.132466989087224</c:v>
                 </c:pt>
                 <c:pt idx="9">
-                  <c:v>24.77933895430645</c:v>
+                  <c:v>24.84501895430645</c:v>
                 </c:pt>
                 <c:pt idx="10">
-                  <c:v>24.75323584683132</c:v>
+                  <c:v>24.85907584683132</c:v>
                 </c:pt>
               </c:numCache>
             </c:numRef>
@@ -26331,7 +26331,7 @@
                 </a:solidFill>
                 <a:latin typeface="Calibri"/>
               </a:rPr>
-              <a:t>A leitura inverte-se: a Diversificação, a dimensão de nível mais baixo (24,8), é a que mais progrediu desde 2015 (+24,0%). O Mercado de Trabalho, o nível mais alto, é dos que menos avança (+3,5%). Recuam a Inclusão Social e a Saúde/Segurança Alimentar.</a:t>
+              <a:t>A leitura inverte-se: a Diversificação, a dimensão de nível mais baixo (24,9), é a que mais progrediu desde 2015 (+24,4%). O Capital Humano, hoje o nível mais alto (59,1), também avança (+17,0%); a Macroeconomia (49,4) é, entre as dimensões em progresso, a que menos avança (+1,3%). Recuam a Inclusão Social (−2,7%) e a Saúde/Segurança Alimentar (−4,1%) — a Saúde/Segurança Alimentar era o nível mais alto em 2015 (59,2).</a:t>
             </a:r>
           </a:p>
         </p:txBody>
@@ -27371,7 +27371,7 @@
                           </a:solidFill>
                           <a:latin typeface="Calibri"/>
                         </a:rPr>
-                        <a:t>124</a:t>
+                        <a:t>123</a:t>
                       </a:r>
                     </a:p>
                   </a:txBody>
@@ -27414,7 +27414,7 @@
                           </a:solidFill>
                           <a:latin typeface="Calibri"/>
                         </a:rPr>
-                        <a:t>115</a:t>
+                        <a:t>114</a:t>
                       </a:r>
                     </a:p>
                   </a:txBody>
@@ -27586,7 +27586,7 @@
                           </a:solidFill>
                           <a:latin typeface="Calibri"/>
                         </a:rPr>
-                        <a:t>+24,0%</a:t>
+                        <a:t>+24,4%</a:t>
                       </a:r>
                     </a:p>
                   </a:txBody>
@@ -29314,7 +29314,7 @@
                           </a:solidFill>
                           <a:latin typeface="Calibri"/>
                         </a:rPr>
-                        <a:t>Mercado Trabalho</a:t>
+                        <a:t>Mercado de Trabalho</a:t>
                       </a:r>
                     </a:p>
                   </a:txBody>
@@ -30176,7 +30176,7 @@
                           </a:solidFill>
                           <a:latin typeface="Calibri"/>
                         </a:rPr>
-                        <a:t>100</a:t>
+                        <a:t>99</a:t>
                       </a:r>
                     </a:p>
                   </a:txBody>
@@ -30262,56 +30262,13 @@
                           </a:solidFill>
                           <a:latin typeface="Calibri"/>
                         </a:rPr>
-                        <a:t>96</a:t>
+                        <a:t>95</a:t>
                       </a:r>
                     </a:p>
                   </a:txBody>
                   <a:tcPr marL="27432" marR="27432" marT="9144" marB="9144" anchor="ctr">
                     <a:solidFill>
                       <a:srgbClr val="FCE4D6"/>
-                    </a:solidFill>
-                    <a:lnL w="6350">
-                      <a:solidFill>
-                        <a:srgbClr val="FFFFFF"/>
-                      </a:solidFill>
-                    </a:lnL>
-                    <a:lnR w="6350">
-                      <a:solidFill>
-                        <a:srgbClr val="FFFFFF"/>
-                      </a:solidFill>
-                    </a:lnR>
-                    <a:lnT w="6350">
-                      <a:solidFill>
-                        <a:srgbClr val="FFFFFF"/>
-                      </a:solidFill>
-                    </a:lnT>
-                    <a:lnB w="6350">
-                      <a:solidFill>
-                        <a:srgbClr val="FFFFFF"/>
-                      </a:solidFill>
-                    </a:lnB>
-                  </a:tcPr>
-                </a:tc>
-                <a:tc>
-                  <a:txBody>
-                    <a:bodyPr/>
-                    <a:lstStyle/>
-                    <a:p>
-                      <a:pPr algn="ctr"/>
-                      <a:r>
-                        <a:rPr lang="pt-PT" sz="900" b="0" dirty="0">
-                          <a:solidFill>
-                            <a:srgbClr val="1A1A1A"/>
-                          </a:solidFill>
-                          <a:latin typeface="Calibri"/>
-                        </a:rPr>
-                        <a:t>100</a:t>
-                      </a:r>
-                    </a:p>
-                  </a:txBody>
-                  <a:tcPr marL="27432" marR="27432" marT="9144" marB="9144" anchor="ctr">
-                    <a:solidFill>
-                      <a:srgbClr val="F2F2F2"/>
                     </a:solidFill>
                     <a:lnL w="6350">
                       <a:solidFill>
@@ -30385,13 +30342,56 @@
                     <a:p>
                       <a:pPr algn="ctr"/>
                       <a:r>
+                        <a:rPr lang="pt-PT" sz="900" b="0" dirty="0">
+                          <a:solidFill>
+                            <a:srgbClr val="1A1A1A"/>
+                          </a:solidFill>
+                          <a:latin typeface="Calibri"/>
+                        </a:rPr>
+                        <a:t>101</a:t>
+                      </a:r>
+                    </a:p>
+                  </a:txBody>
+                  <a:tcPr marL="27432" marR="27432" marT="9144" marB="9144" anchor="ctr">
+                    <a:solidFill>
+                      <a:srgbClr val="F2F2F2"/>
+                    </a:solidFill>
+                    <a:lnL w="6350">
+                      <a:solidFill>
+                        <a:srgbClr val="FFFFFF"/>
+                      </a:solidFill>
+                    </a:lnL>
+                    <a:lnR w="6350">
+                      <a:solidFill>
+                        <a:srgbClr val="FFFFFF"/>
+                      </a:solidFill>
+                    </a:lnR>
+                    <a:lnT w="6350">
+                      <a:solidFill>
+                        <a:srgbClr val="FFFFFF"/>
+                      </a:solidFill>
+                    </a:lnT>
+                    <a:lnB w="6350">
+                      <a:solidFill>
+                        <a:srgbClr val="FFFFFF"/>
+                      </a:solidFill>
+                    </a:lnB>
+                  </a:tcPr>
+                </a:tc>
+                <a:tc>
+                  <a:txBody>
+                    <a:bodyPr/>
+                    <a:lstStyle/>
+                    <a:p>
+                      <a:pPr algn="ctr"/>
+                      <a:r>
                         <a:rPr lang="pt-PT" sz="900" b="1" dirty="0">
                           <a:solidFill>
                             <a:srgbClr val="2E7D32"/>
                           </a:solidFill>
                           <a:latin typeface="Calibri"/>
                         </a:rPr>
-                        <a:t>+1,2%</a:t>
+                        <a:t>+1,3%</a:t>
                       </a:r>
                     </a:p>
                   </a:txBody>
@@ -31126,7 +31126,7 @@
                           </a:solidFill>
                           <a:latin typeface="Calibri"/>
                         </a:rPr>
-                        <a:t>98</a:t>
+                        <a:t>97</a:t>
                       </a:r>
                     </a:p>
                   </a:txBody>
@@ -31513,7 +31513,7 @@
                           </a:solidFill>
                           <a:latin typeface="Calibri"/>
                         </a:rPr>
-                        <a:t>−3,8%</a:t>
+                        <a:t>−4,1%</a:t>
                       </a:r>
                     </a:p>
                   </a:txBody>
@@ -31945,7 +31945,7 @@
                           </a:solidFill>
                           <a:latin typeface="Calibri"/>
                         </a:rPr>
-                        <a:t>106</a:t>
+                        <a:t>105</a:t>
                       </a:r>
                     </a:p>
                   </a:txBody>
@@ -32137,7 +32137,7 @@
                 </a:solidFill>
                 <a:latin typeface="Calibri"/>
               </a:rPr>
-              <a:t>Esta escala compara ritmos de progresso, não patamares de desenvolvimento: 124 na Diversificação e 104 no Mercado de Trabalho significam que a primeira cresceu mais desde 2015, não que esteja num nível superior. Fonte: construtor IGDA-BDA v8, folha 11_Escala_Comum.</a:t>
+              <a:t>Esta escala compara ritmos de progresso, não patamares de desenvolvimento: 124 na Diversificação e 104 no Mercado de Trabalho significam que a primeira cresceu mais desde 2015, não que esteja num nível superior. Valores arredondados ao inteiro a partir do valor exacto. Fonte: construtor IGDA-BDA v8, folha 11_Escala_Comum.</a:t>
             </a:r>
           </a:p>
         </p:txBody>
@@ -33735,7 +33735,7 @@
                 <a:latin typeface="Arial Narrow" panose="020B0606020202030204" pitchFamily="34" charset="0"/>
                 <a:cs typeface="DIN2014-DemiBold"/>
               </a:rPr>
-              <a:t>PIB não petrolífero  +35,9</a:t>
+              <a:t>PIB não petrolífero  +36,3</a:t>
             </a:r>
           </a:p>
           <a:p>
@@ -33920,7 +33920,7 @@
                 <a:latin typeface="Arial Narrow" panose="020B0606020202030204" pitchFamily="34" charset="0"/>
                 <a:cs typeface="DIN2014-DemiBold"/>
               </a:rPr>
-              <a:t>(Δ do score normalizado, p.p., 2015–2025; saldo e dívida com séries FMI WEO Abr-2026)</a:t>
+              <a:t>(Δ do score normalizado, p.p., 2015–2025; saldo e dívida com séries FMI WEO Abr-2026, dados MINFIN)</a:t>
             </a:r>
           </a:p>
         </p:txBody>
@@ -39124,7 +39124,7 @@
                 <a:latin typeface="Arial Narrow" panose="020B0606020202030204" pitchFamily="34" charset="0"/>
                 <a:cs typeface="DIN2014-DemiBold"/>
               </a:rPr>
-              <a:t>Mortalidade materna  +7,9</a:t>
+              <a:t>Mortalidade materna  +6,6</a:t>
             </a:r>
           </a:p>
           <a:p>
@@ -40107,7 +40107,7 @@
                 <a:latin typeface="Arial Narrow" panose="020B0606020202030204" pitchFamily="34" charset="0"/>
                 <a:cs typeface="DIN2014-DemiBold"/>
               </a:rPr>
-              <a:t>PIB não petrolífero  +35,9</a:t>
+              <a:t>PIB não petrolífero  +36,3</a:t>
             </a:r>
           </a:p>
           <a:p>
@@ -41063,7 +41063,22 @@
             </a:pPr>
             <a:r>
               <a:rPr lang="pt-PT" sz="1150" kern="0" dirty="0"/>
-              <a:t>•  Concluído (v8): metas 2027 alinhadas com o PDN; séries de dívida/saldo com fonte oficial (FMI WEO); leitura INE do emprego (folha 12)</a:t>
+              <a:t>•  Concluído (v8): metas 2027 alinhadas com o PDN (directas, transpostas, convertidas) e documentadas; séries de dívida/saldo com fonte oficial (FMI WEO, dados MINFIN); leitura INE do emprego (folha 12)</a:t>
+            </a:r>
+          </a:p>
+          <a:p>
+            <a:pPr marL="171450" indent="-171450">
+              <a:lnSpc>
+                <a:spcPct val="100000"/>
+              </a:lnSpc>
+              <a:spcBef>
+                <a:spcPts val="400"/>
+              </a:spcBef>
+              <a:buNone/>
+            </a:pPr>
+            <a:r>
+              <a:rPr lang="pt-PT" sz="1150" kern="0" dirty="0"/>
+              <a:t>•  Rever as metas já cumpridas na última observação (9 dos 41 indicadores, sobretudo metas operacionais herdadas)</a:t>
             </a:r>
           </a:p>
           <a:p>
@@ -41108,22 +41123,7 @@
             </a:pPr>
             <a:r>
               <a:rPr lang="pt-PT" sz="1150" kern="0" dirty="0"/>
-              <a:t>•  Substituir a escolaridade obrigatória (variável legal) por um indicador de resultado</a:t>
-            </a:r>
-          </a:p>
-          <a:p>
-            <a:pPr marL="171450" indent="-171450">
-              <a:lnSpc>
-                <a:spcPct val="100000"/>
-              </a:lnSpc>
-              <a:spcBef>
-                <a:spcPts val="400"/>
-              </a:spcBef>
-              <a:buNone/>
-            </a:pPr>
-            <a:r>
-              <a:rPr lang="pt-PT" sz="1150" kern="0" dirty="0"/>
-              <a:t>•  Rever 2024–2025 com dados definitivos; executar a análise de sensibilidade (passo 7 OCDE/JRC)</a:t>
+              <a:t>•  Substituir a escolaridade obrigatória (variável legal) por um indicador de resultado; rever 2024–2025 com dados definitivos; análise de sensibilidade (passo 7 OCDE/JRC)</a:t>
             </a:r>
           </a:p>
         </p:txBody>
@@ -41328,7 +41328,7 @@
             </a:pPr>
             <a:r>
               <a:rPr lang="pt-PT" sz="1150" kern="0" dirty="0"/>
-              <a:t>•  Níveis não comparáveis entre dimensões: cada uma tem goalposts próprios</a:t>
+              <a:t>•  Níveis não comparáveis entre dimensões: cada uma tem goalposts próprios; selecção de Macroeconomia sensível ao marcador de fonte nacional</a:t>
             </a:r>
           </a:p>
           <a:p>
@@ -41343,7 +41343,7 @@
             </a:pPr>
             <a:r>
               <a:rPr lang="pt-PT" sz="1150" kern="0" dirty="0"/>
-              <a:t>•  Sensibilidade às escolhas de desenho ainda não quantificada</a:t>
+              <a:t>•  Fontes internacionais (WGI, OMS, UNCTAD, TI) mantidas no vintage da v7, não reverificadas; sensibilidade às escolhas de desenho ainda não quantificada</a:t>
             </a:r>
           </a:p>
         </p:txBody>
@@ -42196,7 +42196,7 @@
                     <a:p>
                       <a:r>
                         <a:rPr sz="900"/>
-                        <a:t>Dívida 60% do PIB superada (FMI 51,3%); inflação 15,7% Dez-25; défice 4,1%</a:t>
+                        <a:t>Dívida PDN 66 → 60% (perímetro MINFIN) = 57,4 → 52,2% na série FMI (51,3% em 2025); inflação 15,7% Dez-25; défice 4,1%</a:t>
                       </a:r>
                     </a:p>
                   </a:txBody>
@@ -42209,7 +42209,7 @@
                     <a:p>
                       <a:r>
                         <a:rPr sz="900"/>
-                        <a:t>+2,7 p.p.; dívida +16,3, inflação −13,0, saldo −6,3</a:t>
+                        <a:t>+2,8 p.p.; dívida +16,3, inflação −13,0, saldo −6,3</a:t>
                       </a:r>
                     </a:p>
                   </a:txBody>
@@ -42317,7 +42317,7 @@
                     <a:p>
                       <a:r>
                         <a:rPr sz="900"/>
-                        <a:t>+3,9 p.p., só por representação política</a:t>
+                        <a:t>+3,9 p.p., só por representação política (+9,1)</a:t>
                       </a:r>
                     </a:p>
                   </a:txBody>
@@ -42479,7 +42479,7 @@
                     <a:p>
                       <a:r>
                         <a:rPr sz="900"/>
-                        <a:t>−1,2 p.p.; vacinal −10,0, malária e desnutrição pesam</a:t>
+                        <a:t>−1,4 p.p.; vacinal −10,0 e malária −0,7 pesam; desnutrição sem dados pós-2023 (−16,6 na década)</a:t>
                       </a:r>
                     </a:p>
                   </a:txBody>
@@ -42520,7 +42520,7 @@
                     <a:p>
                       <a:r>
                         <a:rPr sz="900"/>
-                        <a:t>Não petrolífero 4,6%/ano (5,2% em 2025); IDE e exportações aquém</a:t>
+                        <a:t>Não petrolífero 4,6%/ano (5,4% em 2025); IDE e exportações aquém</a:t>
                       </a:r>
                     </a:p>
                   </a:txBody>
@@ -42533,7 +42533,7 @@
                     <a:p>
                       <a:r>
                         <a:rPr sz="900"/>
-                        <a:t>+1,5 p.p.; PIB n.p. +10,8; crédito −1,1</a:t>
+                        <a:t>+1,7 p.p.; PIB n.p. +11,9; crédito −1,1</a:t>
                       </a:r>
                     </a:p>
                   </a:txBody>
@@ -47766,7 +47766,7 @@
                   <a:srgbClr val="1A1A1A"/>
                 </a:solidFill>
               </a:rPr>
-              <a:t>Arquitectura em três níveis — indicadores → dimensões → índice global —, inspirada no Índice de Desenvolvimento Humano. O motor de selecção do construtor parte de um catálogo de 331 indicadores candidatos e escolhe automaticamente os melhores de cada dimensão, com curadoria de não-redundância.</a:t>
+              <a:t>Arquitectura em três níveis — indicadores → dimensões → índice global —, inspirada no Índice de Desenvolvimento Humano. O motor de selecção do construtor parte de um catálogo de 338 indicadores candidatos (331 na v7 + 7 na v8) e escolhe automaticamente os melhores de cada dimensão, com curadoria de não-redundância.</a:t>
             </a:r>
           </a:p>
           <a:p>
@@ -50518,7 +50518,7 @@
                   </a:solidFill>
                   <a:latin typeface="Arial Narrow" panose="020B0606020202030204" pitchFamily="34" charset="0"/>
                 </a:rPr>
-                <a:t>42,2</a:t>
+                <a:t>42,3</a:t>
               </a:r>
             </a:p>
           </p:txBody>
@@ -50936,7 +50936,7 @@
                 </a:solidFill>
                 <a:latin typeface="Calibri"/>
               </a:rPr>
-              <a:t>IGDA 2025: 45,7 — máximo da série (v8); classificação Médio (40–60)</a:t>
+              <a:t>IGDA 2025: 45,7 (v8, provisório) — ao nível do máximo da série (2024: 45,7); classificação Médio (40–60)</a:t>
             </a:r>
           </a:p>
           <a:p>
@@ -51008,7 +51008,7 @@
                 </a:solidFill>
                 <a:latin typeface="Calibri"/>
               </a:rPr>
-              <a:t>Evolução — lideram: Diversificação +24,0% e Governança +21,1% (2015 = 100)</a:t>
+              <a:t>Evolução — lideram: Diversificação +24,4% e Governança +21,1% (2015 = 100)</a:t>
             </a:r>
           </a:p>
           <a:p>
@@ -51026,7 +51026,7 @@
                 </a:solidFill>
                 <a:latin typeface="Calibri"/>
               </a:rPr>
-              <a:t>Evolução — recuam: Saúde/Alimentar −3,8% e Inclusão Social −2,7%</a:t>
+              <a:t>Evolução — recuam: Saúde/Segurança Alimentar −4,1% e Inclusão Social −2,7%</a:t>
             </a:r>
           </a:p>
         </p:txBody>
@@ -52227,7 +52227,7 @@
                           </a:solidFill>
                           <a:latin typeface="Calibri"/>
                         </a:rPr>
-                        <a:t>48,7</a:t>
+                        <a:t>48,8</a:t>
                       </a:r>
                     </a:p>
                   </a:txBody>
@@ -52270,7 +52270,7 @@
                           </a:solidFill>
                           <a:latin typeface="Calibri"/>
                         </a:rPr>
-                        <a:t>44,0</a:t>
+                        <a:t>44,1</a:t>
                       </a:r>
                     </a:p>
                   </a:txBody>
@@ -52356,7 +52356,7 @@
                           </a:solidFill>
                           <a:latin typeface="Calibri"/>
                         </a:rPr>
-                        <a:t>46,6</a:t>
+                        <a:t>46,7</a:t>
                       </a:r>
                     </a:p>
                   </a:txBody>
@@ -52485,7 +52485,7 @@
                           </a:solidFill>
                           <a:latin typeface="Calibri"/>
                         </a:rPr>
-                        <a:t>48,6</a:t>
+                        <a:t>48,5</a:t>
                       </a:r>
                     </a:p>
                   </a:txBody>
@@ -52528,7 +52528,7 @@
                           </a:solidFill>
                           <a:latin typeface="Calibri"/>
                         </a:rPr>
-                        <a:t>50,2</a:t>
+                        <a:t>50,1</a:t>
                       </a:r>
                     </a:p>
                   </a:txBody>
@@ -52571,7 +52571,7 @@
                           </a:solidFill>
                           <a:latin typeface="Calibri"/>
                         </a:rPr>
-                        <a:t>46,7</a:t>
+                        <a:t>46,6</a:t>
                       </a:r>
                     </a:p>
                   </a:txBody>
@@ -52657,7 +52657,7 @@
                           </a:solidFill>
                           <a:latin typeface="Calibri"/>
                         </a:rPr>
-                        <a:t>49,3</a:t>
+                        <a:t>49,4</a:t>
                       </a:r>
                     </a:p>
                   </a:txBody>
@@ -55204,7 +55204,7 @@
                           </a:solidFill>
                           <a:latin typeface="Calibri"/>
                         </a:rPr>
-                        <a:t>57,0</a:t>
+                        <a:t>56,8</a:t>
                       </a:r>
                     </a:p>
                   </a:txBody>
@@ -55247,7 +55247,7 @@
                           </a:solidFill>
                           <a:latin typeface="Calibri"/>
                         </a:rPr>
-                        <a:t>57,0</a:t>
+                        <a:t>56,8</a:t>
                       </a:r>
                     </a:p>
                   </a:txBody>
@@ -55378,7 +55378,7 @@
                           </a:solidFill>
                           <a:latin typeface="Calibri"/>
                         </a:rPr>
-                        <a:t>23,4</a:t>
+                        <a:t>23,5</a:t>
                       </a:r>
                     </a:p>
                   </a:txBody>
@@ -55464,7 +55464,7 @@
                           </a:solidFill>
                           <a:latin typeface="Calibri"/>
                         </a:rPr>
-                        <a:t>23,1</a:t>
+                        <a:t>23,2</a:t>
                       </a:r>
                     </a:p>
                   </a:txBody>
@@ -55593,7 +55593,7 @@
                           </a:solidFill>
                           <a:latin typeface="Calibri"/>
                         </a:rPr>
-                        <a:t>24,7</a:t>
+                        <a:t>24,6</a:t>
                       </a:r>
                     </a:p>
                   </a:txBody>
@@ -55636,7 +55636,7 @@
                           </a:solidFill>
                           <a:latin typeface="Calibri"/>
                         </a:rPr>
-                        <a:t>23,0</a:t>
+                        <a:t>22,9</a:t>
                       </a:r>
                     </a:p>
                   </a:txBody>
@@ -55679,7 +55679,7 @@
                           </a:solidFill>
                           <a:latin typeface="Calibri"/>
                         </a:rPr>
-                        <a:t>23,2</a:t>
+                        <a:t>23,1</a:t>
                       </a:r>
                     </a:p>
                   </a:txBody>
@@ -55765,7 +55765,7 @@
                           </a:solidFill>
                           <a:latin typeface="Calibri"/>
                         </a:rPr>
-                        <a:t>24,8</a:t>
+                        <a:t>24,9</a:t>
                       </a:r>
                     </a:p>
                   </a:txBody>
@@ -55853,7 +55853,7 @@
                           </a:solidFill>
                           <a:latin typeface="Calibri"/>
                         </a:rPr>
-                        <a:t>42,2</a:t>
+                        <a:t>42,3</a:t>
                       </a:r>
                     </a:p>
                   </a:txBody>
@@ -56111,7 +56111,7 @@
                           </a:solidFill>
                           <a:latin typeface="Calibri"/>
                         </a:rPr>
-                        <a:t>43,6</a:t>
+                        <a:t>43,5</a:t>
                       </a:r>
                     </a:p>
                   </a:txBody>
@@ -56154,7 +56154,7 @@
                           </a:solidFill>
                           <a:latin typeface="Calibri"/>
                         </a:rPr>
-                        <a:t>44,4</a:t>
+                        <a:t>44,3</a:t>
                       </a:r>
                     </a:p>
                   </a:txBody>
@@ -56965,7 +56965,7 @@
                 <a:latin typeface="Arial Narrow" panose="020B0606020202030204" pitchFamily="34" charset="0"/>
                 <a:cs typeface="DIN2014-DemiBold"/>
               </a:rPr>
-              <a:t>No conjunto do período, o IGDA sobe de 42,2 (2015) para 45,7 (2025) — +3,4 p.p. —, permanecendo na banda Médio (40–60). O progresso é puxado por Capital Humano (+8,6), Governança (+5,8), Diversificação (+4,8); recuam Saúde/Alimentar (−2,2) e Inclusão Social (−1,4).</a:t>
+              <a:t>No conjunto do período, o IGDA sobe de 42,3 (2015) para 45,7 (2025) — +3,4 p.p. —, permanecendo na banda Médio (40–60). O progresso é puxado por Capital Humano (+8,6), Governança (+5,8), Diversificação (+4,9); recuam Saúde/Segurança Alimentar (−2,4) e Inclusão Social (−1,4).</a:t>
             </a:r>
           </a:p>
           <a:p>
@@ -56986,7 +56986,7 @@
                 <a:latin typeface="Arial Narrow" panose="020B0606020202030204" pitchFamily="34" charset="0"/>
                 <a:cs typeface="DIN2014-DemiBold"/>
               </a:rPr>
-              <a:t>O nível continua condicionado por duas dimensões na banda Baixo — Diversificação (24,8) e Governança (33,2) — e sensível a choques macroeconómicos, como em 2016–2017 e, sobretudo, em 2020.</a:t>
+              <a:t>O nível continua condicionado por duas dimensões na banda Baixo — Diversificação (24,9) e Governança (33,2) — e sensível a choques macroeconómicos, como em 2016–2017 e, sobretudo, em 2020.</a:t>
             </a:r>
           </a:p>
           <a:p>
@@ -57515,7 +57515,7 @@
                   <a:latin typeface="Arial Narrow" panose="020B0606020202030204" pitchFamily="34" charset="0"/>
                   <a:cs typeface="DIN2014-DemiBold"/>
                 </a:rPr>
-                <a:t>2021–2024 — recuperação sustentada: +6,0 p.p. face a 2020, com máximos da série.</a:t>
+                <a:t>2021–2024 — recuperação sustentada: +6,0 p.p. face a 2020, com o máximo da série em 2024 (45,7).</a:t>
               </a:r>
             </a:p>
             <a:p>
@@ -57536,7 +57536,7 @@
                   <a:latin typeface="Arial Narrow" panose="020B0606020202030204" pitchFamily="34" charset="0"/>
                   <a:cs typeface="DIN2014-DemiBold"/>
                 </a:rPr>
-                <a:t>2025 — 45,7 pontos: estável (−0,0 p.p.); valor provisório (v8: dados INE/FMI de 2026).</a:t>
+                <a:t>2025 — 45,7 pontos: estável (+0,0 p.p.); valor provisório (v8: dados INE/FMI de 2026).</a:t>
               </a:r>
             </a:p>
           </p:txBody>
@@ -58638,7 +58638,7 @@
                   <a:srgbClr val="1A1A1A"/>
                 </a:solidFill>
               </a:rPr>
-              <a:t>Entre 2023 e 2025 o IGDA sobe de 44,6 para 45,7 pontos (+1,1 p.p.), o máximo da série. O ganho concentra-se em 2024 (+1,1 p.p.); em 2025 o índice fica estável (−0,0 p.p.).</a:t>
+              <a:t>Entre 2023 e 2025 o IGDA sobe de 44,6 para 45,7 pontos (+1,1 p.p.), ficando ao nível do máximo da série (2024: 45,7). O ganho concentra-se em 2024 (+1,1 p.p.); em 2025 o índice fica estável (+0,0 p.p.).</a:t>
             </a:r>
           </a:p>
           <a:p>
@@ -58657,7 +58657,7 @@
                   <a:srgbClr val="1A1A1A"/>
                 </a:solidFill>
               </a:rPr>
-              <a:t>2025 é provisório: 21 dos 41 indicadores têm observação nesse ano (14 até 2024 e 6 até 2023); os restantes entram por carry-forward.</a:t>
+              <a:t>2025 é provisório: 21 dos 41 indicadores têm observação nesse ano (13 até 2024 e 7 até 2023); os restantes entram por carry-forward.</a:t>
             </a:r>
           </a:p>
         </p:txBody>
@@ -58808,7 +58808,7 @@
             </a:pPr>
             <a:r>
               <a:rPr lang="pt-PT" sz="1100" kern="0" dirty="0"/>
-              <a:t>•  Segurança Alimentar e Saúde −1,2 — cobertura vacinal (−10,0)</a:t>
+              <a:t>•  Segurança Alimentar e Saúde −1,4 — cobertura vacinal (−10,0)</a:t>
             </a:r>
           </a:p>
           <a:p>
@@ -59028,7 +59028,7 @@
             </a:pPr>
             <a:r>
               <a:rPr lang="pt-PT" sz="1100" kern="0" dirty="0"/>
-              <a:t>•  Estabilidade Macroeconómica +2,7 — dívida pública (+16,3)</a:t>
+              <a:t>•  Estabilidade Macroeconómica +2,8 — dívida pública (+16,3)</a:t>
             </a:r>
           </a:p>
           <a:p>
@@ -59043,7 +59043,7 @@
             </a:pPr>
             <a:r>
               <a:rPr lang="pt-PT" sz="1100" kern="0" dirty="0"/>
-              <a:t>•  Diversificação Produtiva e Setor Privado +1,5 — pib não petrolífero (+10,8)</a:t>
+              <a:t>•  Diversificação Produtiva e Sector Privado +1,7 — PIB não petrolífero (+11,9)</a:t>
             </a:r>
           </a:p>
           <a:p>
@@ -59058,7 +59058,7 @@
             </a:pPr>
             <a:r>
               <a:rPr lang="pt-PT" sz="1100" kern="0" dirty="0"/>
-              <a:t>•  Infraestruturas e Serviços +1,0 — tráfego portuário (teu) (+3,1)</a:t>
+              <a:t>•  Infraestruturas e Serviços +1,0 — tráfego portuário (TEU) (+3,1)</a:t>
             </a:r>
           </a:p>
           <a:p>

--- a/Versão Final/Finalíssima/files/IGDA_Evolucao_CEX_v10.pptx
+++ b/Versão Final/Finalíssima/files/IGDA_Evolucao_CEX_v10.pptx
@@ -41063,7 +41063,7 @@
             </a:pPr>
             <a:r>
               <a:rPr lang="pt-PT" sz="1150" kern="0" dirty="0"/>
-              <a:t>•  Concluído (v8): metas 2027 alinhadas com o PDN (directas, transpostas, convertidas) e documentadas; séries de dívida/saldo com fonte oficial (FMI WEO, dados MINFIN); leitura INE do emprego (folha 12)</a:t>
+              <a:t>•  Concluído (v8): séries de dívida/saldo com fonte oficial (FMI WEO, dados MINFIN); leitura INE do emprego (folha 12). Parcialmente concluído: metas 2027 alinhadas com o PDN (directas, transpostas, convertidas) e documentadas</a:t>
             </a:r>
           </a:p>
           <a:p>
@@ -42038,7 +42038,7 @@
                   <a:srgbClr val="1F3864"/>
                 </a:solidFill>
               </a:rPr>
-              <a:t>Em seis das oito dimensões o IGDA e o Balanço do PDN contam a mesma história — uma validação externa da construção. Nos dois pilares do PDN as leituras divergem: o capital humano avança devagar e a segurança alimentar regride nos indicadores de processo antes de as metas de mortalidade o reflectirem.</a:t>
+              <a:t>Em cinco das oito dimensões o IGDA e o Balanço do PDN contam a mesma história — uma validação externa da construção —, duas delas com alerta (o capital humano avança devagar; a segurança alimentar regride nos indicadores de processo antes de as metas de mortalidade o reflectirem). Em duas a leitura é parcial (Inclusão Social, Diversificação) e em uma é inconsistente (Mercado de Trabalho: desfasamento de vintage das séries OIT e produtividade em queda).</a:t>
             </a:r>
           </a:p>
         </p:txBody>
@@ -42250,7 +42250,7 @@
                     <a:p>
                       <a:r>
                         <a:rPr sz="900"/>
-                        <a:t>Esperança de vida 62 → 63; educação 11,8% da despesa</a:t>
+                        <a:t>Esperança de vida 62 → 63; educação 10,0% → 11,8% da despesa total (PDN p.22)</a:t>
                       </a:r>
                     </a:p>
                   </a:txBody>
@@ -42466,7 +42466,7 @@
                     <a:p>
                       <a:r>
                         <a:rPr sz="900"/>
-                        <a:t>Mortalidade &lt;5 69 → 51; materna 199 → 165; vacinação 76% vs 80%</a:t>
+                        <a:t>Mortalidade &lt;5 69 → 51; materna 199 → 165; vacinação MINSA 76% vs 80% (WUENIC 53% em 2024)</a:t>
                       </a:r>
                     </a:p>
                   </a:txBody>
@@ -47785,7 +47785,7 @@
                   <a:srgbClr val="1A1A1A"/>
                 </a:solidFill>
               </a:rPr>
-              <a:t>Resultado: 41 indicadores em 8 dimensões activas (de 11 definidas); 19 dos 41 têm fonte nacional (INE, BNA, MINFIN, MINSA, MINEA, MINTRANS).</a:t>
+              <a:t>Resultado: 41 indicadores em 8 dimensões activas (de 11 definidas); 19 dos 41 têm fonte nacional (INE, BNA, MINFIN, MINSA, MINEA, MEP; inclui estimativas internacionais construídas sobre dados nacionais).</a:t>
             </a:r>
           </a:p>
         </p:txBody>
